--- a/dist/초4/국어/언어문학매체/초4_국어_언어문학매체_01_문장의기본짜임_학생용.pptx
+++ b/dist/초4/국어/언어문학매체/초4_국어_언어문학매체_01_문장의기본짜임_학생용.pptx
@@ -119,13 +119,13 @@
   <p:extLst>
     <p:ext uri="{521415D9-36F7-43E2-AB2F-B90AF26B5E84}">
       <p14:sectionLst xmlns:p14="http://schemas.microsoft.com/office/powerpoint/2010/main">
-        <p14:section name="도입" id="{ca2b28be-979c-5734-238c-983d36c4c69f}">
+        <p14:section name="도입" id="{6f801da1-ea7c-9d8d-88d3-c962135b4e87}">
           <p14:sldIdLst>
             <p14:sldId id="256"/>
             <p14:sldId id="257"/>
           </p14:sldIdLst>
         </p14:section>
-        <p14:section name="개념" id="{1c487b16-ce94-cd24-5ed3-f22319fb35ec}">
+        <p14:section name="개념" id="{5a7d7332-5913-286e-b968-37029b674d72}">
           <p14:sldIdLst>
             <p14:sldId id="258"/>
             <p14:sldId id="259"/>
@@ -133,25 +133,25 @@
             <p14:sldId id="261"/>
           </p14:sldIdLst>
         </p14:section>
-        <p14:section name="연습" id="{0fe97eaf-31e8-2081-3280-0d028c2a2633}">
+        <p14:section name="연습" id="{c8161def-c5aa-6e86-cffa-a7beaf209bb6}">
           <p14:sldIdLst>
             <p14:sldId id="262"/>
             <p14:sldId id="263"/>
             <p14:sldId id="264"/>
           </p14:sldIdLst>
         </p14:section>
-        <p14:section name="확인" id="{af08a2a3-2355-360d-1364-ef802881fa4a}">
+        <p14:section name="확인" id="{cbee2b82-7cc3-b9f2-5aab-1346260caf0b}">
           <p14:sldIdLst>
             <p14:sldId id="265"/>
             <p14:sldId id="266"/>
           </p14:sldIdLst>
         </p14:section>
-        <p14:section name="정리" id="{caf56c65-c36e-91aa-d9e7-f8080dd18b2c}">
+        <p14:section name="정리" id="{d4183243-d545-f716-462e-026d3fc2e069}">
           <p14:sldIdLst>
             <p14:sldId id="267"/>
           </p14:sldIdLst>
         </p14:section>
-        <p14:section name="보충" id="{47e27a34-ace3-4c7e-2e9d-7c693b8feefd}">
+        <p14:section name="보충" id="{4ca643c1-4cb3-54d0-bdb6-273a25ed07a7}">
           <p14:sldIdLst>
             <p14:sldId id="268"/>
           </p14:sldIdLst>
@@ -6663,7 +6663,7 @@
           </p:nvPr>
         </p:nvGraphicFramePr>
         <p:xfrm>
-          <a:off x="836676" y="2798445"/>
+          <a:off x="836676" y="2797302"/>
           <a:ext cx="10515600" cy="914400"/>
         </p:xfrm>
         <a:graphic>
@@ -6675,7 +6675,7 @@
                 <a:gridCol w="4732020"/>
                 <a:gridCol w="2628900"/>
               </a:tblGrid>
-              <a:tr h="511810">
+              <a:tr h="512572">
                 <a:tc>
                   <a:txBody>
                     <a:bodyPr/>
@@ -6881,7 +6881,7 @@
                   </a:tcPr>
                 </a:tc>
               </a:tr>
-              <a:tr h="511810">
+              <a:tr h="512572">
                 <a:tc>
                   <a:txBody>
                     <a:bodyPr/>
@@ -7087,7 +7087,7 @@
                   </a:tcPr>
                 </a:tc>
               </a:tr>
-              <a:tr h="511810">
+              <a:tr h="512572">
                 <a:tc>
                   <a:txBody>
                     <a:bodyPr/>

--- a/dist/초4/국어/언어문학매체/초4_국어_언어문학매체_01_문장의기본짜임_학생용.pptx
+++ b/dist/초4/국어/언어문학매체/초4_국어_언어문학매체_01_문장의기본짜임_학생용.pptx
@@ -119,13 +119,13 @@
   <p:extLst>
     <p:ext uri="{521415D9-36F7-43E2-AB2F-B90AF26B5E84}">
       <p14:sectionLst xmlns:p14="http://schemas.microsoft.com/office/powerpoint/2010/main">
-        <p14:section name="도입" id="{6f801da1-ea7c-9d8d-88d3-c962135b4e87}">
+        <p14:section name="도입" id="{45020fe8-8731-08d9-96c6-b8a1fc1d0f44}">
           <p14:sldIdLst>
             <p14:sldId id="256"/>
             <p14:sldId id="257"/>
           </p14:sldIdLst>
         </p14:section>
-        <p14:section name="개념" id="{5a7d7332-5913-286e-b968-37029b674d72}">
+        <p14:section name="개념" id="{18a31d20-77be-7786-984c-a99ca26b5bd0}">
           <p14:sldIdLst>
             <p14:sldId id="258"/>
             <p14:sldId id="259"/>
@@ -133,25 +133,25 @@
             <p14:sldId id="261"/>
           </p14:sldIdLst>
         </p14:section>
-        <p14:section name="연습" id="{c8161def-c5aa-6e86-cffa-a7beaf209bb6}">
+        <p14:section name="연습" id="{4964eec0-4424-077e-7e31-1fe59ca115e3}">
           <p14:sldIdLst>
             <p14:sldId id="262"/>
             <p14:sldId id="263"/>
             <p14:sldId id="264"/>
           </p14:sldIdLst>
         </p14:section>
-        <p14:section name="확인" id="{cbee2b82-7cc3-b9f2-5aab-1346260caf0b}">
+        <p14:section name="확인" id="{3d512cd2-319a-70cf-a46d-5239c304f51a}">
           <p14:sldIdLst>
             <p14:sldId id="265"/>
             <p14:sldId id="266"/>
           </p14:sldIdLst>
         </p14:section>
-        <p14:section name="정리" id="{d4183243-d545-f716-462e-026d3fc2e069}">
+        <p14:section name="정리" id="{48dc4195-344e-dd96-eb2a-d21196b1d343}">
           <p14:sldIdLst>
             <p14:sldId id="267"/>
           </p14:sldIdLst>
         </p14:section>
-        <p14:section name="보충" id="{4ca643c1-4cb3-54d0-bdb6-273a25ed07a7}">
+        <p14:section name="보충" id="{86065009-6415-1f7c-69fb-70a82641dd27}">
           <p14:sldIdLst>
             <p14:sldId id="268"/>
           </p14:sldIdLst>
